--- a/assets/decks/Module_01_Kitchen_Foundations.pptx
+++ b/assets/decks/Module_01_Kitchen_Foundations.pptx
@@ -8417,6 +8417,7 @@
                   <a:srgbClr val="C0392B"/>
                 </a:solidFill>
                 <a:latin typeface="Calibri"/>
+                <a:hlinkClick r:id="rId2"/>
               </a:rPr>
               <a:t>Internet Shaquille (efficiency &amp; fundamentals)</a:t>
             </a:r>
@@ -8459,6 +8460,7 @@
                   <a:srgbClr val="B5651D"/>
                 </a:solidFill>
                 <a:latin typeface="Calibri"/>
+                <a:hlinkClick r:id="rId2"/>
               </a:rPr>
               <a:t>https://www.youtube.com/@internetshaquille</a:t>
             </a:r>
@@ -8635,6 +8637,7 @@
                   <a:srgbClr val="C0392B"/>
                 </a:solidFill>
                 <a:latin typeface="Calibri"/>
+                <a:hlinkClick r:id="rId3"/>
               </a:rPr>
               <a:t>Adam Ragusea (practical home technique)</a:t>
             </a:r>
@@ -8677,6 +8680,7 @@
                   <a:srgbClr val="B5651D"/>
                 </a:solidFill>
                 <a:latin typeface="Calibri"/>
+                <a:hlinkClick r:id="rId3"/>
               </a:rPr>
               <a:t>https://www.youtube.com/@aragusea</a:t>
             </a:r>
@@ -8853,6 +8857,7 @@
                   <a:srgbClr val="C0392B"/>
                 </a:solidFill>
                 <a:latin typeface="Calibri"/>
+                <a:hlinkClick r:id="rId4"/>
               </a:rPr>
               <a:t>USDA FSIS - Safe Minimum Internal Temperature Chart</a:t>
             </a:r>
@@ -8895,6 +8900,7 @@
                   <a:srgbClr val="B5651D"/>
                 </a:solidFill>
                 <a:latin typeface="Calibri"/>
+                <a:hlinkClick r:id="rId4"/>
               </a:rPr>
               <a:t>https://www.fsis.usda.gov/food-safety/safe-food-handling-and-preparation/food-safety-basics/safe-temperature-chart</a:t>
             </a:r>
@@ -9071,6 +9077,7 @@
                   <a:srgbClr val="C0392B"/>
                 </a:solidFill>
                 <a:latin typeface="Calibri"/>
+                <a:hlinkClick r:id="rId5"/>
               </a:rPr>
               <a:t>FoodSafety.gov - Safe Minimum Internal Temperatures</a:t>
             </a:r>
@@ -9113,6 +9120,7 @@
                   <a:srgbClr val="B5651D"/>
                 </a:solidFill>
                 <a:latin typeface="Calibri"/>
+                <a:hlinkClick r:id="rId5"/>
               </a:rPr>
               <a:t>https://www.foodsafety.gov/food-safety-charts/safe-minimum-internal-temperatures</a:t>
             </a:r>
